--- a/2_Getting_Data.pptx
+++ b/2_Getting_Data.pptx
@@ -196,7 +196,7 @@
             </a:lvl1pPr>
           </a:lstStyle>
           <a:p>
-            <a:endParaRPr lang="en-GB"/>
+            <a:endParaRPr lang="en-GB" dirty="0"/>
           </a:p>
         </p:txBody>
       </p:sp>
@@ -229,9 +229,9 @@
           <a:p>
             <a:fld id="{73D5C047-4BF6-2244-A5E3-D41B1218D9A5}" type="datetimeFigureOut">
               <a:rPr lang="en-GB" smtClean="0"/>
-              <a:t>22/08/2024</a:t>
+              <a:t>02/04/2025</a:t>
             </a:fld>
-            <a:endParaRPr lang="en-GB"/>
+            <a:endParaRPr lang="en-GB" dirty="0"/>
           </a:p>
         </p:txBody>
       </p:sp>
@@ -262,7 +262,7 @@
             </a:lvl1pPr>
           </a:lstStyle>
           <a:p>
-            <a:endParaRPr lang="en-GB"/>
+            <a:endParaRPr lang="en-GB" dirty="0"/>
           </a:p>
         </p:txBody>
       </p:sp>
@@ -297,7 +297,7 @@
               <a:rPr lang="en-GB" smtClean="0"/>
               <a:t>‹#›</a:t>
             </a:fld>
-            <a:endParaRPr lang="en-GB"/>
+            <a:endParaRPr lang="en-GB" dirty="0"/>
           </a:p>
         </p:txBody>
       </p:sp>
@@ -361,7 +361,7 @@
             </a:lvl1pPr>
           </a:lstStyle>
           <a:p>
-            <a:endParaRPr lang="en-GB"/>
+            <a:endParaRPr lang="en-GB" dirty="0"/>
           </a:p>
         </p:txBody>
       </p:sp>
@@ -394,9 +394,9 @@
           <a:p>
             <a:fld id="{8A376A05-844D-A64C-9434-FF3712A59FB6}" type="datetimeFigureOut">
               <a:rPr lang="en-GB" smtClean="0"/>
-              <a:t>22/08/2024</a:t>
+              <a:t>02/04/2025</a:t>
             </a:fld>
-            <a:endParaRPr lang="en-GB"/>
+            <a:endParaRPr lang="en-GB" dirty="0"/>
           </a:p>
         </p:txBody>
       </p:sp>
@@ -429,7 +429,7 @@
           <a:bodyPr vert="horz" lIns="91440" tIns="45720" rIns="91440" bIns="45720" rtlCol="0" anchor="ctr"/>
           <a:lstStyle/>
           <a:p>
-            <a:endParaRPr lang="en-GB"/>
+            <a:endParaRPr lang="en-GB" dirty="0"/>
           </a:p>
         </p:txBody>
       </p:sp>
@@ -520,7 +520,7 @@
             </a:lvl1pPr>
           </a:lstStyle>
           <a:p>
-            <a:endParaRPr lang="en-GB"/>
+            <a:endParaRPr lang="en-GB" dirty="0"/>
           </a:p>
         </p:txBody>
       </p:sp>
@@ -555,7 +555,7 @@
               <a:rPr lang="en-GB" smtClean="0"/>
               <a:t>‹#›</a:t>
             </a:fld>
-            <a:endParaRPr lang="en-GB"/>
+            <a:endParaRPr lang="en-GB" dirty="0"/>
           </a:p>
         </p:txBody>
       </p:sp>
@@ -754,7 +754,7 @@
               <a:rPr lang="en-GB" smtClean="0"/>
               <a:t>1</a:t>
             </a:fld>
-            <a:endParaRPr lang="en-GB"/>
+            <a:endParaRPr lang="en-GB" dirty="0"/>
           </a:p>
         </p:txBody>
       </p:sp>
@@ -838,7 +838,7 @@
               <a:rPr lang="en-US" smtClean="0"/>
               <a:t>10</a:t>
             </a:fld>
-            <a:endParaRPr lang="en-US"/>
+            <a:endParaRPr lang="en-US" dirty="0"/>
           </a:p>
         </p:txBody>
       </p:sp>
@@ -922,7 +922,7 @@
               <a:rPr lang="en-US" smtClean="0"/>
               <a:t>11</a:t>
             </a:fld>
-            <a:endParaRPr lang="en-US"/>
+            <a:endParaRPr lang="en-US" dirty="0"/>
           </a:p>
         </p:txBody>
       </p:sp>
@@ -1053,7 +1053,7 @@
               </a:pPr>
               <a:t>12</a:t>
             </a:fld>
-            <a:endParaRPr kumimoji="0" lang="en-US" sz="1200" b="0" i="0" u="none" strike="noStrike" kern="1200" cap="none" spc="0" normalizeH="0" baseline="0" noProof="0">
+            <a:endParaRPr kumimoji="0" lang="en-US" sz="1200" b="0" i="0" u="none" strike="noStrike" kern="1200" cap="none" spc="0" normalizeH="0" baseline="0" noProof="0" dirty="0">
               <a:ln>
                 <a:noFill/>
               </a:ln>
@@ -1150,7 +1150,7 @@
               <a:rPr lang="en-US" smtClean="0"/>
               <a:t>13</a:t>
             </a:fld>
-            <a:endParaRPr lang="en-US"/>
+            <a:endParaRPr lang="en-US" dirty="0"/>
           </a:p>
         </p:txBody>
       </p:sp>
@@ -1281,7 +1281,7 @@
               </a:pPr>
               <a:t>14</a:t>
             </a:fld>
-            <a:endParaRPr kumimoji="0" lang="en-US" sz="1200" b="0" i="0" u="none" strike="noStrike" kern="1200" cap="none" spc="0" normalizeH="0" baseline="0" noProof="0">
+            <a:endParaRPr kumimoji="0" lang="en-US" sz="1200" b="0" i="0" u="none" strike="noStrike" kern="1200" cap="none" spc="0" normalizeH="0" baseline="0" noProof="0" dirty="0">
               <a:ln>
                 <a:noFill/>
               </a:ln>
@@ -1378,7 +1378,7 @@
               <a:rPr lang="en-US" smtClean="0"/>
               <a:t>15</a:t>
             </a:fld>
-            <a:endParaRPr lang="en-US"/>
+            <a:endParaRPr lang="en-US" dirty="0"/>
           </a:p>
         </p:txBody>
       </p:sp>
@@ -1487,7 +1487,7 @@
               <a:rPr lang="en-GB" smtClean="0"/>
               <a:t>16</a:t>
             </a:fld>
-            <a:endParaRPr lang="en-GB"/>
+            <a:endParaRPr lang="en-GB" dirty="0"/>
           </a:p>
         </p:txBody>
       </p:sp>
@@ -1575,31 +1575,7 @@
                 <a:ea typeface="+mn-ea"/>
                 <a:cs typeface="+mn-cs"/>
               </a:rPr>
-              <a:t>Map adapted from </a:t>
-            </a:r>
-            <a:r>
-              <a:rPr lang="en-SG" sz="1200" b="0" i="0" u="none" strike="noStrike" kern="1200" dirty="0" err="1">
-                <a:solidFill>
-                  <a:schemeClr val="tx1"/>
-                </a:solidFill>
-                <a:effectLst/>
-                <a:latin typeface="+mn-lt"/>
-                <a:ea typeface="+mn-ea"/>
-                <a:cs typeface="+mn-cs"/>
-              </a:rPr>
-              <a:t>Mafessoni</a:t>
-            </a:r>
-            <a:r>
-              <a:rPr lang="en-SG" sz="1200" b="0" i="0" u="none" strike="noStrike" kern="1200" dirty="0">
-                <a:solidFill>
-                  <a:schemeClr val="tx1"/>
-                </a:solidFill>
-                <a:effectLst/>
-                <a:latin typeface="+mn-lt"/>
-                <a:ea typeface="+mn-ea"/>
-                <a:cs typeface="+mn-cs"/>
-              </a:rPr>
-              <a:t>, F. (2019). Encounters with archaic hominins. </a:t>
+              <a:t>Map adapted from Mafessoni, F. (2019). Encounters with archaic hominins. </a:t>
             </a:r>
             <a:r>
               <a:rPr lang="en-SG" sz="1200" b="0" i="1" u="none" strike="noStrike" kern="1200" dirty="0">
@@ -1623,31 +1599,7 @@
                 <a:ea typeface="+mn-ea"/>
                 <a:cs typeface="+mn-cs"/>
               </a:rPr>
-              <a:t>. 3, 14–15. (https://</a:t>
-            </a:r>
-            <a:r>
-              <a:rPr lang="en-SG" sz="1200" b="0" i="0" u="none" strike="noStrike" kern="1200" dirty="0" err="1">
-                <a:solidFill>
-                  <a:schemeClr val="tx1"/>
-                </a:solidFill>
-                <a:effectLst/>
-                <a:latin typeface="+mn-lt"/>
-                <a:ea typeface="+mn-ea"/>
-                <a:cs typeface="+mn-cs"/>
-              </a:rPr>
-              <a:t>www.nature.com</a:t>
-            </a:r>
-            <a:r>
-              <a:rPr lang="en-SG" sz="1200" b="0" i="0" u="none" strike="noStrike" kern="1200" dirty="0">
-                <a:solidFill>
-                  <a:schemeClr val="tx1"/>
-                </a:solidFill>
-                <a:effectLst/>
-                <a:latin typeface="+mn-lt"/>
-                <a:ea typeface="+mn-ea"/>
-                <a:cs typeface="+mn-cs"/>
-              </a:rPr>
-              <a:t>/articles/s41559-018-0729-6)</a:t>
+              <a:t>. 3, 14–15. (https://www.nature.com/articles/s41559-018-0729-6)</a:t>
             </a:r>
           </a:p>
         </p:txBody>
@@ -1671,7 +1623,7 @@
               <a:rPr lang="en-GB" smtClean="0"/>
               <a:t>2</a:t>
             </a:fld>
-            <a:endParaRPr lang="en-GB"/>
+            <a:endParaRPr lang="en-GB" dirty="0"/>
           </a:p>
         </p:txBody>
       </p:sp>
@@ -1755,7 +1707,7 @@
               <a:rPr lang="en-US" smtClean="0"/>
               <a:t>3</a:t>
             </a:fld>
-            <a:endParaRPr lang="en-US"/>
+            <a:endParaRPr lang="en-US" dirty="0"/>
           </a:p>
         </p:txBody>
       </p:sp>
@@ -1839,7 +1791,7 @@
               <a:rPr lang="en-US" smtClean="0"/>
               <a:t>4</a:t>
             </a:fld>
-            <a:endParaRPr lang="en-US"/>
+            <a:endParaRPr lang="en-US" dirty="0"/>
           </a:p>
         </p:txBody>
       </p:sp>
@@ -1923,7 +1875,7 @@
               <a:rPr lang="en-US" smtClean="0"/>
               <a:t>5</a:t>
             </a:fld>
-            <a:endParaRPr lang="en-US"/>
+            <a:endParaRPr lang="en-US" dirty="0"/>
           </a:p>
         </p:txBody>
       </p:sp>
@@ -2007,7 +1959,7 @@
               <a:rPr lang="en-US" smtClean="0"/>
               <a:t>6</a:t>
             </a:fld>
-            <a:endParaRPr lang="en-US"/>
+            <a:endParaRPr lang="en-US" dirty="0"/>
           </a:p>
         </p:txBody>
       </p:sp>
@@ -2091,7 +2043,7 @@
               <a:rPr lang="en-US" smtClean="0"/>
               <a:t>7</a:t>
             </a:fld>
-            <a:endParaRPr lang="en-US"/>
+            <a:endParaRPr lang="en-US" dirty="0"/>
           </a:p>
         </p:txBody>
       </p:sp>
@@ -2175,7 +2127,7 @@
               <a:rPr lang="en-US" smtClean="0"/>
               <a:t>8</a:t>
             </a:fld>
-            <a:endParaRPr lang="en-US"/>
+            <a:endParaRPr lang="en-US" dirty="0"/>
           </a:p>
         </p:txBody>
       </p:sp>
@@ -2259,7 +2211,7 @@
               <a:rPr lang="en-US" smtClean="0"/>
               <a:t>9</a:t>
             </a:fld>
-            <a:endParaRPr lang="en-US"/>
+            <a:endParaRPr lang="en-US" dirty="0"/>
           </a:p>
         </p:txBody>
       </p:sp>
@@ -11069,9 +11021,9 @@
           <a:p>
             <a:fld id="{5D8171C0-695E-BD4E-B021-8976B44C063A}" type="datetime1">
               <a:rPr lang="en-SG" smtClean="0"/>
-              <a:t>22/8/24</a:t>
+              <a:t>2/4/25</a:t>
             </a:fld>
-            <a:endParaRPr lang="en-GB"/>
+            <a:endParaRPr lang="en-GB" dirty="0"/>
           </a:p>
         </p:txBody>
       </p:sp>
@@ -11090,7 +11042,7 @@
           <a:bodyPr/>
           <a:lstStyle/>
           <a:p>
-            <a:endParaRPr lang="en-GB"/>
+            <a:endParaRPr lang="en-GB" dirty="0"/>
           </a:p>
         </p:txBody>
       </p:sp>
@@ -11113,7 +11065,7 @@
               <a:rPr lang="en-GB" smtClean="0"/>
               <a:t>‹#›</a:t>
             </a:fld>
-            <a:endParaRPr lang="en-GB"/>
+            <a:endParaRPr lang="en-GB" dirty="0"/>
           </a:p>
         </p:txBody>
       </p:sp>
@@ -11276,9 +11228,9 @@
           <a:p>
             <a:fld id="{6F853C54-8EB9-C24B-9C31-2B1DDC9DE9A6}" type="datetime1">
               <a:rPr lang="en-SG" smtClean="0"/>
-              <a:t>22/8/24</a:t>
+              <a:t>2/4/25</a:t>
             </a:fld>
-            <a:endParaRPr lang="en-GB"/>
+            <a:endParaRPr lang="en-GB" dirty="0"/>
           </a:p>
         </p:txBody>
       </p:sp>
@@ -11297,7 +11249,7 @@
           <a:bodyPr/>
           <a:lstStyle/>
           <a:p>
-            <a:endParaRPr lang="en-GB"/>
+            <a:endParaRPr lang="en-GB" dirty="0"/>
           </a:p>
         </p:txBody>
       </p:sp>
@@ -11320,7 +11272,7 @@
               <a:rPr lang="en-GB" smtClean="0"/>
               <a:t>‹#›</a:t>
             </a:fld>
-            <a:endParaRPr lang="en-GB"/>
+            <a:endParaRPr lang="en-GB" dirty="0"/>
           </a:p>
         </p:txBody>
       </p:sp>
@@ -11451,9 +11403,9 @@
           <a:p>
             <a:fld id="{3472FA3B-614A-7B44-98FC-38DCC6EB32F4}" type="datetime1">
               <a:rPr lang="en-SG" smtClean="0"/>
-              <a:t>22/8/24</a:t>
+              <a:t>2/4/25</a:t>
             </a:fld>
-            <a:endParaRPr lang="en-GB"/>
+            <a:endParaRPr lang="en-GB" dirty="0"/>
           </a:p>
         </p:txBody>
       </p:sp>
@@ -11472,7 +11424,7 @@
           <a:bodyPr/>
           <a:lstStyle/>
           <a:p>
-            <a:endParaRPr lang="en-GB"/>
+            <a:endParaRPr lang="en-GB" dirty="0"/>
           </a:p>
         </p:txBody>
       </p:sp>
@@ -11495,7 +11447,7 @@
               <a:rPr lang="en-GB" smtClean="0"/>
               <a:t>‹#›</a:t>
             </a:fld>
-            <a:endParaRPr lang="en-GB"/>
+            <a:endParaRPr lang="en-GB" dirty="0"/>
           </a:p>
         </p:txBody>
       </p:sp>
@@ -11685,9 +11637,9 @@
           <a:p>
             <a:fld id="{159A31D3-5D48-6C49-8100-1BFEDDA27045}" type="datetime1">
               <a:rPr lang="en-SG" smtClean="0"/>
-              <a:t>22/8/24</a:t>
+              <a:t>2/4/25</a:t>
             </a:fld>
-            <a:endParaRPr lang="en-GB"/>
+            <a:endParaRPr lang="en-GB" dirty="0"/>
           </a:p>
         </p:txBody>
       </p:sp>
@@ -11706,7 +11658,7 @@
           <a:bodyPr/>
           <a:lstStyle/>
           <a:p>
-            <a:endParaRPr lang="en-GB"/>
+            <a:endParaRPr lang="en-GB" dirty="0"/>
           </a:p>
         </p:txBody>
       </p:sp>
@@ -20590,9 +20542,9 @@
           <a:p>
             <a:fld id="{33FB4DE5-3FA5-CB41-9D0A-192659D1CB71}" type="datetime1">
               <a:rPr lang="en-SG" smtClean="0"/>
-              <a:t>22/8/24</a:t>
+              <a:t>2/4/25</a:t>
             </a:fld>
-            <a:endParaRPr lang="en-GB"/>
+            <a:endParaRPr lang="en-GB" dirty="0"/>
           </a:p>
         </p:txBody>
       </p:sp>
@@ -20611,7 +20563,7 @@
           <a:bodyPr/>
           <a:lstStyle/>
           <a:p>
-            <a:endParaRPr lang="en-GB"/>
+            <a:endParaRPr lang="en-GB" dirty="0"/>
           </a:p>
         </p:txBody>
       </p:sp>
@@ -20634,7 +20586,7 @@
               <a:rPr lang="en-GB" smtClean="0"/>
               <a:t>‹#›</a:t>
             </a:fld>
-            <a:endParaRPr lang="en-GB"/>
+            <a:endParaRPr lang="en-GB" dirty="0"/>
           </a:p>
         </p:txBody>
       </p:sp>
@@ -20863,9 +20815,9 @@
           <a:p>
             <a:fld id="{2BA4E459-705C-6E47-A7D6-9BAC4DCC79E5}" type="datetime1">
               <a:rPr lang="en-SG" smtClean="0"/>
-              <a:t>22/8/24</a:t>
+              <a:t>2/4/25</a:t>
             </a:fld>
-            <a:endParaRPr lang="en-GB"/>
+            <a:endParaRPr lang="en-GB" dirty="0"/>
           </a:p>
         </p:txBody>
       </p:sp>
@@ -20884,7 +20836,7 @@
           <a:bodyPr/>
           <a:lstStyle/>
           <a:p>
-            <a:endParaRPr lang="en-GB"/>
+            <a:endParaRPr lang="en-GB" dirty="0"/>
           </a:p>
         </p:txBody>
       </p:sp>
@@ -20907,7 +20859,7 @@
               <a:rPr lang="en-GB" smtClean="0"/>
               <a:t>‹#›</a:t>
             </a:fld>
-            <a:endParaRPr lang="en-GB"/>
+            <a:endParaRPr lang="en-GB" dirty="0"/>
           </a:p>
         </p:txBody>
       </p:sp>
@@ -21261,9 +21213,9 @@
           <a:p>
             <a:fld id="{7A41D9F5-A799-534F-ADC1-59DEE366892C}" type="datetime1">
               <a:rPr lang="en-SG" smtClean="0"/>
-              <a:t>22/8/24</a:t>
+              <a:t>2/4/25</a:t>
             </a:fld>
-            <a:endParaRPr lang="en-GB"/>
+            <a:endParaRPr lang="en-GB" dirty="0"/>
           </a:p>
         </p:txBody>
       </p:sp>
@@ -21282,7 +21234,7 @@
           <a:bodyPr/>
           <a:lstStyle/>
           <a:p>
-            <a:endParaRPr lang="en-GB"/>
+            <a:endParaRPr lang="en-GB" dirty="0"/>
           </a:p>
         </p:txBody>
       </p:sp>
@@ -21305,7 +21257,7 @@
               <a:rPr lang="en-GB" smtClean="0"/>
               <a:t>‹#›</a:t>
             </a:fld>
-            <a:endParaRPr lang="en-GB"/>
+            <a:endParaRPr lang="en-GB" dirty="0"/>
           </a:p>
         </p:txBody>
       </p:sp>
@@ -21379,9 +21331,9 @@
           <a:p>
             <a:fld id="{65CD0D58-1596-D242-A555-BB899CD37BDE}" type="datetime1">
               <a:rPr lang="en-SG" smtClean="0"/>
-              <a:t>22/8/24</a:t>
+              <a:t>2/4/25</a:t>
             </a:fld>
-            <a:endParaRPr lang="en-GB"/>
+            <a:endParaRPr lang="en-GB" dirty="0"/>
           </a:p>
         </p:txBody>
       </p:sp>
@@ -21400,7 +21352,7 @@
           <a:bodyPr/>
           <a:lstStyle/>
           <a:p>
-            <a:endParaRPr lang="en-GB"/>
+            <a:endParaRPr lang="en-GB" dirty="0"/>
           </a:p>
         </p:txBody>
       </p:sp>
@@ -21423,7 +21375,7 @@
               <a:rPr lang="en-GB" smtClean="0"/>
               <a:t>‹#›</a:t>
             </a:fld>
-            <a:endParaRPr lang="en-GB"/>
+            <a:endParaRPr lang="en-GB" dirty="0"/>
           </a:p>
         </p:txBody>
       </p:sp>
@@ -21469,9 +21421,9 @@
           <a:p>
             <a:fld id="{C6195D21-BC09-2042-8183-6DEFCDF5312A}" type="datetime1">
               <a:rPr lang="en-SG" smtClean="0"/>
-              <a:t>22/8/24</a:t>
+              <a:t>2/4/25</a:t>
             </a:fld>
-            <a:endParaRPr lang="en-GB"/>
+            <a:endParaRPr lang="en-GB" dirty="0"/>
           </a:p>
         </p:txBody>
       </p:sp>
@@ -21490,7 +21442,7 @@
           <a:bodyPr/>
           <a:lstStyle/>
           <a:p>
-            <a:endParaRPr lang="en-GB"/>
+            <a:endParaRPr lang="en-GB" dirty="0"/>
           </a:p>
         </p:txBody>
       </p:sp>
@@ -21513,7 +21465,7 @@
               <a:rPr lang="en-GB" smtClean="0"/>
               <a:t>‹#›</a:t>
             </a:fld>
-            <a:endParaRPr lang="en-GB"/>
+            <a:endParaRPr lang="en-GB" dirty="0"/>
           </a:p>
         </p:txBody>
       </p:sp>
@@ -21759,9 +21711,9 @@
           <a:p>
             <a:fld id="{96BFDC18-B983-004C-8152-2C2BF2CFEDD7}" type="datetime1">
               <a:rPr lang="en-SG" smtClean="0"/>
-              <a:t>22/8/24</a:t>
+              <a:t>2/4/25</a:t>
             </a:fld>
-            <a:endParaRPr lang="en-GB"/>
+            <a:endParaRPr lang="en-GB" dirty="0"/>
           </a:p>
         </p:txBody>
       </p:sp>
@@ -21780,7 +21732,7 @@
           <a:bodyPr/>
           <a:lstStyle/>
           <a:p>
-            <a:endParaRPr lang="en-GB"/>
+            <a:endParaRPr lang="en-GB" dirty="0"/>
           </a:p>
         </p:txBody>
       </p:sp>
@@ -21803,7 +21755,7 @@
               <a:rPr lang="en-GB" smtClean="0"/>
               <a:t>‹#›</a:t>
             </a:fld>
-            <a:endParaRPr lang="en-GB"/>
+            <a:endParaRPr lang="en-GB" dirty="0"/>
           </a:p>
         </p:txBody>
       </p:sp>
@@ -21935,10 +21887,9 @@
           </a:lstStyle>
           <a:p>
             <a:r>
-              <a:rPr lang="en-US"/>
+              <a:rPr lang="en-US" dirty="0"/>
               <a:t>Drag picture to placeholder or click icon to add</a:t>
             </a:r>
-            <a:endParaRPr lang="en-US" dirty="0"/>
           </a:p>
         </p:txBody>
       </p:sp>
@@ -22039,9 +21990,9 @@
           <a:p>
             <a:fld id="{2B69BD44-7826-F548-A836-9F6150569590}" type="datetime1">
               <a:rPr lang="en-SG" smtClean="0"/>
-              <a:t>22/8/24</a:t>
+              <a:t>2/4/25</a:t>
             </a:fld>
-            <a:endParaRPr lang="en-GB"/>
+            <a:endParaRPr lang="en-GB" dirty="0"/>
           </a:p>
         </p:txBody>
       </p:sp>
@@ -22083,7 +22034,7 @@
               <a:rPr lang="en-GB" smtClean="0"/>
               <a:t>‹#›</a:t>
             </a:fld>
-            <a:endParaRPr lang="en-GB"/>
+            <a:endParaRPr lang="en-GB" dirty="0"/>
           </a:p>
         </p:txBody>
       </p:sp>
@@ -22407,9 +22358,9 @@
           <a:p>
             <a:fld id="{2DC3BF20-5808-0847-A21A-F2A835930045}" type="datetime1">
               <a:rPr lang="en-SG" smtClean="0"/>
-              <a:t>22/8/24</a:t>
+              <a:t>2/4/25</a:t>
             </a:fld>
-            <a:endParaRPr lang="en-GB"/>
+            <a:endParaRPr lang="en-GB" dirty="0"/>
           </a:p>
         </p:txBody>
       </p:sp>
@@ -22448,7 +22399,7 @@
             </a:lvl1pPr>
           </a:lstStyle>
           <a:p>
-            <a:endParaRPr lang="en-GB"/>
+            <a:endParaRPr lang="en-GB" dirty="0"/>
           </a:p>
         </p:txBody>
       </p:sp>
@@ -22492,7 +22443,7 @@
               <a:pPr/>
               <a:t>‹#›</a:t>
             </a:fld>
-            <a:endParaRPr lang="en-GB"/>
+            <a:endParaRPr lang="en-GB" dirty="0"/>
           </a:p>
         </p:txBody>
       </p:sp>
@@ -22992,7 +22943,7 @@
           <a:lstStyle/>
           <a:p>
             <a:pPr algn="ctr"/>
-            <a:endParaRPr lang="en-US"/>
+            <a:endParaRPr lang="en-US" dirty="0"/>
           </a:p>
         </p:txBody>
       </p:sp>
@@ -23058,7 +23009,7 @@
           <a:lstStyle/>
           <a:p>
             <a:pPr algn="ctr"/>
-            <a:endParaRPr lang="en-US"/>
+            <a:endParaRPr lang="en-US" dirty="0"/>
           </a:p>
         </p:txBody>
       </p:sp>
@@ -24311,7 +24262,7 @@
             </a:pPr>
             <a:r>
               <a:rPr lang="en-US" b="1" dirty="0"/>
-              <a:t>From RAT miRNA: FOCAL can be predicted, DIFFUES not (due to type of RAT injury)?</a:t>
+              <a:t>From RAT miRNA: FOCAL can be predicted, DIFFUSE not (due to type of RAT injury)?</a:t>
             </a:r>
           </a:p>
           <a:p>
@@ -24378,7 +24329,7 @@
               <a:rPr lang="en-GB" smtClean="0"/>
               <a:t>16</a:t>
             </a:fld>
-            <a:endParaRPr lang="en-GB"/>
+            <a:endParaRPr lang="en-GB" dirty="0"/>
           </a:p>
         </p:txBody>
       </p:sp>
@@ -24474,7 +24425,7 @@
               <a:rPr lang="en-GB" smtClean="0"/>
               <a:t>2</a:t>
             </a:fld>
-            <a:endParaRPr lang="en-GB"/>
+            <a:endParaRPr lang="en-GB" dirty="0"/>
           </a:p>
         </p:txBody>
       </p:sp>
@@ -25028,35 +24979,14 @@
                 <a:latin typeface="Calibri" panose="020F0502020204030204" pitchFamily="34" charset="0"/>
                 <a:cs typeface="Calibri" panose="020F0502020204030204" pitchFamily="34" charset="0"/>
               </a:rPr>
-              <a:t>Map adapted from </a:t>
-            </a:r>
-            <a:r>
-              <a:rPr lang="en-SG" sz="1100" dirty="0" err="1">
-                <a:latin typeface="Calibri" panose="020F0502020204030204" pitchFamily="34" charset="0"/>
-                <a:cs typeface="Calibri" panose="020F0502020204030204" pitchFamily="34" charset="0"/>
-              </a:rPr>
-              <a:t>Mafessoni</a:t>
-            </a:r>
-            <a:r>
-              <a:rPr lang="en-SG" sz="1100" dirty="0">
-                <a:latin typeface="Calibri" panose="020F0502020204030204" pitchFamily="34" charset="0"/>
-                <a:cs typeface="Calibri" panose="020F0502020204030204" pitchFamily="34" charset="0"/>
-              </a:rPr>
-              <a:t>, F. (2019). </a:t>
+              <a:t>Map adapted from Mafessoni, F. (2019). </a:t>
             </a:r>
             <a:r>
               <a:rPr lang="en-SG" sz="1100" i="1" dirty="0">
                 <a:latin typeface="Calibri" panose="020F0502020204030204" pitchFamily="34" charset="0"/>
                 <a:cs typeface="Calibri" panose="020F0502020204030204" pitchFamily="34" charset="0"/>
               </a:rPr>
-              <a:t>Nat. Ecol. </a:t>
-            </a:r>
-            <a:r>
-              <a:rPr lang="en-SG" sz="1100" i="1" dirty="0" err="1">
-                <a:latin typeface="Calibri" panose="020F0502020204030204" pitchFamily="34" charset="0"/>
-                <a:cs typeface="Calibri" panose="020F0502020204030204" pitchFamily="34" charset="0"/>
-              </a:rPr>
-              <a:t>Evol</a:t>
+              <a:t>Nat. Ecol. Evol</a:t>
             </a:r>
             <a:r>
               <a:rPr lang="en-SG" sz="1100" dirty="0">
@@ -25102,21 +25032,8 @@
           <a:p>
             <a:r>
               <a:rPr lang="en-GB" dirty="0"/>
-              <a:t>Slide from </a:t>
+              <a:t>Slide from Shiyao Ke</a:t>
             </a:r>
-            <a:r>
-              <a:rPr lang="en-GB" dirty="0" err="1"/>
-              <a:t>Shiyao</a:t>
-            </a:r>
-            <a:r>
-              <a:rPr lang="en-GB" dirty="0"/>
-              <a:t> </a:t>
-            </a:r>
-            <a:r>
-              <a:rPr lang="en-GB" dirty="0" err="1"/>
-              <a:t>Ke</a:t>
-            </a:r>
-            <a:endParaRPr lang="en-GB" dirty="0"/>
           </a:p>
         </p:txBody>
       </p:sp>
@@ -25852,15 +25769,7 @@
             </a:br>
             <a:r>
               <a:rPr lang="en-US" dirty="0"/>
-              <a:t>(Rats after 24 </a:t>
-            </a:r>
-            <a:r>
-              <a:rPr lang="en-US" dirty="0" err="1"/>
-              <a:t>hr</a:t>
-            </a:r>
-            <a:r>
-              <a:rPr lang="en-US" dirty="0"/>
-              <a:t>)</a:t>
+              <a:t>(Rats after 24 hr)</a:t>
             </a:r>
           </a:p>
         </p:txBody>
@@ -26087,13 +25996,8 @@
             </a:pPr>
             <a:r>
               <a:rPr lang="en-US" dirty="0"/>
-              <a:t>Does the type of TBI injury </a:t>
+              <a:t>Does the type of TBI injury matter?</a:t>
             </a:r>
-            <a:r>
-              <a:rPr lang="en-US"/>
-              <a:t>matter?</a:t>
-            </a:r>
-            <a:endParaRPr lang="en-US" dirty="0"/>
           </a:p>
         </p:txBody>
       </p:sp>
